--- a/.lessons/13 Fundamental controller/2 Resource controllers/Resource controllers.pptx
+++ b/.lessons/13 Fundamental controller/2 Resource controllers/Resource controllers.pptx
@@ -12,6 +12,9 @@
     <p:sldId id="385" r:id="rId6"/>
     <p:sldId id="386" r:id="rId7"/>
     <p:sldId id="381" r:id="rId8"/>
+    <p:sldId id="387" r:id="rId9"/>
+    <p:sldId id="388" r:id="rId10"/>
+    <p:sldId id="389" r:id="rId11"/>
   </p:sldIdLst>
   <p:sldSz cx="12192000" cy="6858000"/>
   <p:notesSz cx="6858000" cy="9144000"/>
@@ -265,7 +268,7 @@
           <a:p>
             <a:fld id="{3E102D2E-813C-461C-9963-687A650C48C0}" type="datetimeFigureOut">
               <a:rPr lang="en-US" smtClean="0"/>
-              <a:t>4/18/2025</a:t>
+              <a:t>5/10/2025</a:t>
             </a:fld>
             <a:endParaRPr lang="en-US"/>
           </a:p>
@@ -463,7 +466,7 @@
           <a:p>
             <a:fld id="{3E102D2E-813C-461C-9963-687A650C48C0}" type="datetimeFigureOut">
               <a:rPr lang="en-US" smtClean="0"/>
-              <a:t>4/18/2025</a:t>
+              <a:t>5/10/2025</a:t>
             </a:fld>
             <a:endParaRPr lang="en-US"/>
           </a:p>
@@ -671,7 +674,7 @@
           <a:p>
             <a:fld id="{3E102D2E-813C-461C-9963-687A650C48C0}" type="datetimeFigureOut">
               <a:rPr lang="en-US" smtClean="0"/>
-              <a:t>4/18/2025</a:t>
+              <a:t>5/10/2025</a:t>
             </a:fld>
             <a:endParaRPr lang="en-US"/>
           </a:p>
@@ -869,7 +872,7 @@
           <a:p>
             <a:fld id="{3E102D2E-813C-461C-9963-687A650C48C0}" type="datetimeFigureOut">
               <a:rPr lang="en-US" smtClean="0"/>
-              <a:t>4/18/2025</a:t>
+              <a:t>5/10/2025</a:t>
             </a:fld>
             <a:endParaRPr lang="en-US"/>
           </a:p>
@@ -1144,7 +1147,7 @@
           <a:p>
             <a:fld id="{3E102D2E-813C-461C-9963-687A650C48C0}" type="datetimeFigureOut">
               <a:rPr lang="en-US" smtClean="0"/>
-              <a:t>4/18/2025</a:t>
+              <a:t>5/10/2025</a:t>
             </a:fld>
             <a:endParaRPr lang="en-US"/>
           </a:p>
@@ -1409,7 +1412,7 @@
           <a:p>
             <a:fld id="{3E102D2E-813C-461C-9963-687A650C48C0}" type="datetimeFigureOut">
               <a:rPr lang="en-US" smtClean="0"/>
-              <a:t>4/18/2025</a:t>
+              <a:t>5/10/2025</a:t>
             </a:fld>
             <a:endParaRPr lang="en-US"/>
           </a:p>
@@ -1821,7 +1824,7 @@
           <a:p>
             <a:fld id="{3E102D2E-813C-461C-9963-687A650C48C0}" type="datetimeFigureOut">
               <a:rPr lang="en-US" smtClean="0"/>
-              <a:t>4/18/2025</a:t>
+              <a:t>5/10/2025</a:t>
             </a:fld>
             <a:endParaRPr lang="en-US"/>
           </a:p>
@@ -1962,7 +1965,7 @@
           <a:p>
             <a:fld id="{3E102D2E-813C-461C-9963-687A650C48C0}" type="datetimeFigureOut">
               <a:rPr lang="en-US" smtClean="0"/>
-              <a:t>4/18/2025</a:t>
+              <a:t>5/10/2025</a:t>
             </a:fld>
             <a:endParaRPr lang="en-US"/>
           </a:p>
@@ -2075,7 +2078,7 @@
           <a:p>
             <a:fld id="{3E102D2E-813C-461C-9963-687A650C48C0}" type="datetimeFigureOut">
               <a:rPr lang="en-US" smtClean="0"/>
-              <a:t>4/18/2025</a:t>
+              <a:t>5/10/2025</a:t>
             </a:fld>
             <a:endParaRPr lang="en-US"/>
           </a:p>
@@ -2386,7 +2389,7 @@
           <a:p>
             <a:fld id="{3E102D2E-813C-461C-9963-687A650C48C0}" type="datetimeFigureOut">
               <a:rPr lang="en-US" smtClean="0"/>
-              <a:t>4/18/2025</a:t>
+              <a:t>5/10/2025</a:t>
             </a:fld>
             <a:endParaRPr lang="en-US"/>
           </a:p>
@@ -2674,7 +2677,7 @@
           <a:p>
             <a:fld id="{3E102D2E-813C-461C-9963-687A650C48C0}" type="datetimeFigureOut">
               <a:rPr lang="en-US" smtClean="0"/>
-              <a:t>4/18/2025</a:t>
+              <a:t>5/10/2025</a:t>
             </a:fld>
             <a:endParaRPr lang="en-US"/>
           </a:p>
@@ -2915,7 +2918,7 @@
           <a:p>
             <a:fld id="{3E102D2E-813C-461C-9963-687A650C48C0}" type="datetimeFigureOut">
               <a:rPr lang="en-US" smtClean="0"/>
-              <a:t>4/18/2025</a:t>
+              <a:t>5/10/2025</a:t>
             </a:fld>
             <a:endParaRPr lang="en-US"/>
           </a:p>
@@ -3764,6 +3767,92 @@
     <p:extLst>
       <p:ext uri="{BB962C8B-B14F-4D97-AF65-F5344CB8AC3E}">
         <p14:creationId xmlns:p14="http://schemas.microsoft.com/office/powerpoint/2010/main" val="1449302968"/>
+      </p:ext>
+    </p:extLst>
+  </p:cSld>
+  <p:clrMapOvr>
+    <a:masterClrMapping/>
+  </p:clrMapOvr>
+</p:sld>
+</file>
+
+<file path=ppt/slides/slide10.xml><?xml version="1.0" encoding="utf-8"?>
+<p:sld xmlns:a="http://schemas.openxmlformats.org/drawingml/2006/main" xmlns:r="http://schemas.openxmlformats.org/officeDocument/2006/relationships" xmlns:p="http://schemas.openxmlformats.org/presentationml/2006/main">
+  <p:cSld>
+    <p:spTree>
+      <p:nvGrpSpPr>
+        <p:cNvPr id="1" name="">
+          <a:extLst>
+            <a:ext uri="{FF2B5EF4-FFF2-40B4-BE49-F238E27FC236}">
+              <a16:creationId xmlns:a16="http://schemas.microsoft.com/office/drawing/2014/main" id="{7B82C843-C0B2-9A04-F755-02929562F242}"/>
+            </a:ext>
+          </a:extLst>
+        </p:cNvPr>
+        <p:cNvGrpSpPr/>
+        <p:nvPr/>
+      </p:nvGrpSpPr>
+      <p:grpSpPr>
+        <a:xfrm>
+          <a:off x="0" y="0"/>
+          <a:ext cx="0" cy="0"/>
+          <a:chOff x="0" y="0"/>
+          <a:chExt cx="0" cy="0"/>
+        </a:xfrm>
+      </p:grpSpPr>
+      <p:sp>
+        <p:nvSpPr>
+          <p:cNvPr id="3" name="TextBox 2">
+            <a:extLst>
+              <a:ext uri="{FF2B5EF4-FFF2-40B4-BE49-F238E27FC236}">
+                <a16:creationId xmlns:a16="http://schemas.microsoft.com/office/drawing/2014/main" id="{B1BD3F95-FE37-5AD0-8AC7-CB8CAA343CA7}"/>
+              </a:ext>
+            </a:extLst>
+          </p:cNvPr>
+          <p:cNvSpPr txBox="1"/>
+          <p:nvPr/>
+        </p:nvSpPr>
+        <p:spPr>
+          <a:xfrm>
+            <a:off x="217714" y="255046"/>
+            <a:ext cx="11756571" cy="355354"/>
+          </a:xfrm>
+          <a:prstGeom prst="rect">
+            <a:avLst/>
+          </a:prstGeom>
+          <a:noFill/>
+        </p:spPr>
+        <p:txBody>
+          <a:bodyPr wrap="square">
+            <a:spAutoFit/>
+          </a:bodyPr>
+          <a:lstStyle/>
+          <a:p>
+            <a:pPr>
+              <a:lnSpc>
+                <a:spcPct val="150000"/>
+              </a:lnSpc>
+              <a:buNone/>
+            </a:pPr>
+            <a:r>
+              <a:rPr kumimoji="0" lang="en-US" altLang="en-US" sz="1300" b="0" i="0" u="none" strike="noStrike" cap="none" normalizeH="0" baseline="0">
+                <a:ln>
+                  <a:noFill/>
+                </a:ln>
+                <a:solidFill>
+                  <a:schemeClr val="tx1"/>
+                </a:solidFill>
+                <a:effectLst/>
+                <a:latin typeface="Arial" panose="020B0604020202020204" pitchFamily="34" charset="0"/>
+              </a:rPr>
+              <a:t>.</a:t>
+            </a:r>
+          </a:p>
+        </p:txBody>
+      </p:sp>
+    </p:spTree>
+    <p:extLst>
+      <p:ext uri="{BB962C8B-B14F-4D97-AF65-F5344CB8AC3E}">
+        <p14:creationId xmlns:p14="http://schemas.microsoft.com/office/powerpoint/2010/main" val="754059554"/>
       </p:ext>
     </p:extLst>
   </p:cSld>
@@ -6279,6 +6368,760 @@
         <p:spPr>
           <a:xfrm>
             <a:off x="217714" y="255046"/>
+            <a:ext cx="11756571" cy="6056915"/>
+          </a:xfrm>
+          <a:prstGeom prst="rect">
+            <a:avLst/>
+          </a:prstGeom>
+          <a:noFill/>
+        </p:spPr>
+        <p:txBody>
+          <a:bodyPr wrap="square">
+            <a:spAutoFit/>
+          </a:bodyPr>
+          <a:lstStyle/>
+          <a:p>
+            <a:pPr>
+              <a:lnSpc>
+                <a:spcPct val="150000"/>
+              </a:lnSpc>
+              <a:buNone/>
+            </a:pPr>
+            <a:r>
+              <a:rPr lang="az-Latn-AZ" altLang="en-US" sz="1300">
+                <a:latin typeface="Arial" panose="020B0604020202020204" pitchFamily="34" charset="0"/>
+              </a:rPr>
+              <a:t>7ci slaydda </a:t>
+            </a:r>
+            <a:r>
+              <a:rPr lang="az-Latn-AZ" altLang="en-US" sz="1300" b="1">
+                <a:latin typeface="Arial" panose="020B0604020202020204" pitchFamily="34" charset="0"/>
+              </a:rPr>
+              <a:t>Controller</a:t>
+            </a:r>
+            <a:r>
+              <a:rPr lang="az-Latn-AZ" altLang="en-US" sz="1300">
+                <a:latin typeface="Arial" panose="020B0604020202020204" pitchFamily="34" charset="0"/>
+              </a:rPr>
+              <a:t> -də, </a:t>
+            </a:r>
+            <a:r>
+              <a:rPr lang="az-Latn-AZ" altLang="en-US" sz="1300" b="1">
+                <a:latin typeface="Arial" panose="020B0604020202020204" pitchFamily="34" charset="0"/>
+              </a:rPr>
+              <a:t>update() </a:t>
+            </a:r>
+            <a:r>
+              <a:rPr lang="az-Latn-AZ" altLang="en-US" sz="1300">
+                <a:latin typeface="Arial" panose="020B0604020202020204" pitchFamily="34" charset="0"/>
+              </a:rPr>
+              <a:t>metodu içində </a:t>
+            </a:r>
+            <a:r>
+              <a:rPr lang="en-US" altLang="en-US" sz="1300" b="1">
+                <a:solidFill>
+                  <a:srgbClr val="FF0000"/>
+                </a:solidFill>
+                <a:latin typeface="Arial" panose="020B0604020202020204" pitchFamily="34" charset="0"/>
+              </a:rPr>
+              <a:t>$REQUEST</a:t>
+            </a:r>
+            <a:r>
+              <a:rPr lang="az-Latn-AZ" altLang="en-US" sz="1300" b="1">
+                <a:solidFill>
+                  <a:srgbClr val="FF0000"/>
+                </a:solidFill>
+                <a:latin typeface="Arial" panose="020B0604020202020204" pitchFamily="34" charset="0"/>
+              </a:rPr>
+              <a:t> </a:t>
+            </a:r>
+            <a:r>
+              <a:rPr lang="az-Latn-AZ" altLang="en-US" sz="1300">
+                <a:latin typeface="Arial" panose="020B0604020202020204" pitchFamily="34" charset="0"/>
+              </a:rPr>
+              <a:t>deyilən bir parametr var. Bu təkcə </a:t>
+            </a:r>
+            <a:r>
+              <a:rPr lang="az-Latn-AZ" altLang="en-US" sz="1300" b="1">
+                <a:latin typeface="Arial" panose="020B0604020202020204" pitchFamily="34" charset="0"/>
+              </a:rPr>
+              <a:t>update() </a:t>
+            </a:r>
+            <a:r>
+              <a:rPr lang="az-Latn-AZ" altLang="en-US" sz="1300">
+                <a:latin typeface="Arial" panose="020B0604020202020204" pitchFamily="34" charset="0"/>
+              </a:rPr>
+              <a:t>metoduna aid deyil digər istənilən metod üçün istifadə edilən bir parametrdir. Nədir bu </a:t>
+            </a:r>
+            <a:r>
+              <a:rPr lang="en-US" altLang="en-US" sz="1300" b="1">
+                <a:latin typeface="Arial" panose="020B0604020202020204" pitchFamily="34" charset="0"/>
+              </a:rPr>
+              <a:t>$REQUEST </a:t>
+            </a:r>
+            <a:r>
+              <a:rPr lang="en-US" altLang="en-US" sz="1300">
+                <a:latin typeface="Arial" panose="020B0604020202020204" pitchFamily="34" charset="0"/>
+              </a:rPr>
+              <a:t>?</a:t>
+            </a:r>
+            <a:endParaRPr lang="az-Latn-AZ" altLang="en-US" sz="1300">
+              <a:latin typeface="Arial" panose="020B0604020202020204" pitchFamily="34" charset="0"/>
+            </a:endParaRPr>
+          </a:p>
+          <a:p>
+            <a:pPr>
+              <a:lnSpc>
+                <a:spcPct val="150000"/>
+              </a:lnSpc>
+              <a:buNone/>
+            </a:pPr>
+            <a:endParaRPr kumimoji="0" lang="az-Latn-AZ" altLang="en-US" sz="1300" b="0" i="0" u="none" strike="noStrike" cap="none" normalizeH="0" baseline="0">
+              <a:ln>
+                <a:noFill/>
+              </a:ln>
+              <a:solidFill>
+                <a:schemeClr val="tx1"/>
+              </a:solidFill>
+              <a:effectLst/>
+              <a:latin typeface="Arial" panose="020B0604020202020204" pitchFamily="34" charset="0"/>
+            </a:endParaRPr>
+          </a:p>
+          <a:p>
+            <a:pPr marL="285750" indent="-285750">
+              <a:lnSpc>
+                <a:spcPct val="150000"/>
+              </a:lnSpc>
+              <a:buFont typeface="Arial" panose="020B0604020202020204" pitchFamily="34" charset="0"/>
+              <a:buChar char="•"/>
+            </a:pPr>
+            <a:r>
+              <a:rPr kumimoji="0" lang="en-US" altLang="en-US" sz="1300" b="1" i="0" u="none" strike="noStrike" cap="none" normalizeH="0" baseline="0">
+                <a:ln>
+                  <a:noFill/>
+                </a:ln>
+                <a:solidFill>
+                  <a:schemeClr val="tx1"/>
+                </a:solidFill>
+                <a:effectLst/>
+                <a:latin typeface="Arial" panose="020B0604020202020204" pitchFamily="34" charset="0"/>
+              </a:rPr>
+              <a:t>$request </a:t>
+            </a:r>
+            <a:r>
+              <a:rPr kumimoji="0" lang="en-US" altLang="en-US" sz="1300" b="0" i="0" u="none" strike="noStrike" cap="none" normalizeH="0" baseline="0">
+                <a:ln>
+                  <a:noFill/>
+                </a:ln>
+                <a:solidFill>
+                  <a:schemeClr val="tx1"/>
+                </a:solidFill>
+                <a:effectLst/>
+                <a:latin typeface="Arial" panose="020B0604020202020204" pitchFamily="34" charset="0"/>
+              </a:rPr>
+              <a:t>Laravel-də formdan</a:t>
+            </a:r>
+            <a:r>
+              <a:rPr kumimoji="0" lang="az-Latn-AZ" altLang="en-US" sz="1300" b="0" i="0" u="none" strike="noStrike" cap="none" normalizeH="0" baseline="0">
+                <a:ln>
+                  <a:noFill/>
+                </a:ln>
+                <a:solidFill>
+                  <a:schemeClr val="tx1"/>
+                </a:solidFill>
+                <a:effectLst/>
+                <a:latin typeface="Arial" panose="020B0604020202020204" pitchFamily="34" charset="0"/>
+              </a:rPr>
+              <a:t> (19cu dərs qovluğunda görəcəyik bunu)</a:t>
+            </a:r>
+            <a:r>
+              <a:rPr kumimoji="0" lang="en-US" altLang="en-US" sz="1300" b="0" i="0" u="none" strike="noStrike" cap="none" normalizeH="0" baseline="0">
+                <a:ln>
+                  <a:noFill/>
+                </a:ln>
+                <a:solidFill>
+                  <a:schemeClr val="tx1"/>
+                </a:solidFill>
+                <a:effectLst/>
+                <a:latin typeface="Arial" panose="020B0604020202020204" pitchFamily="34" charset="0"/>
+              </a:rPr>
+              <a:t>, </a:t>
+            </a:r>
+            <a:r>
+              <a:rPr kumimoji="0" lang="en-US" altLang="en-US" sz="1300" b="1" i="0" u="none" strike="noStrike" cap="none" normalizeH="0" baseline="0">
+                <a:ln>
+                  <a:noFill/>
+                </a:ln>
+                <a:solidFill>
+                  <a:schemeClr val="tx1"/>
+                </a:solidFill>
+                <a:effectLst/>
+                <a:latin typeface="Arial" panose="020B0604020202020204" pitchFamily="34" charset="0"/>
+              </a:rPr>
+              <a:t>URL</a:t>
+            </a:r>
+            <a:r>
+              <a:rPr kumimoji="0" lang="en-US" altLang="en-US" sz="1300" b="0" i="0" u="none" strike="noStrike" cap="none" normalizeH="0" baseline="0">
+                <a:ln>
+                  <a:noFill/>
+                </a:ln>
+                <a:solidFill>
+                  <a:schemeClr val="tx1"/>
+                </a:solidFill>
+                <a:effectLst/>
+                <a:latin typeface="Arial" panose="020B0604020202020204" pitchFamily="34" charset="0"/>
+              </a:rPr>
+              <a:t>-dən, </a:t>
+            </a:r>
+            <a:r>
+              <a:rPr kumimoji="0" lang="en-US" altLang="en-US" sz="1300" b="1" i="0" u="none" strike="noStrike" cap="none" normalizeH="0" baseline="0">
+                <a:ln>
+                  <a:noFill/>
+                </a:ln>
+                <a:solidFill>
+                  <a:schemeClr val="tx1"/>
+                </a:solidFill>
+                <a:effectLst/>
+                <a:latin typeface="Arial" panose="020B0604020202020204" pitchFamily="34" charset="0"/>
+              </a:rPr>
+              <a:t>JSON API</a:t>
+            </a:r>
+            <a:r>
+              <a:rPr kumimoji="0" lang="en-US" altLang="en-US" sz="1300" b="0" i="0" u="none" strike="noStrike" cap="none" normalizeH="0" baseline="0">
+                <a:ln>
+                  <a:noFill/>
+                </a:ln>
+                <a:solidFill>
+                  <a:schemeClr val="tx1"/>
+                </a:solidFill>
+                <a:effectLst/>
+                <a:latin typeface="Arial" panose="020B0604020202020204" pitchFamily="34" charset="0"/>
+              </a:rPr>
+              <a:t>-dən və s. daxil olan bütün məlumatlara çıxış imkanı verən əsas obyektdir.</a:t>
+            </a:r>
+            <a:r>
+              <a:rPr lang="az-Latn-AZ" altLang="en-US" sz="1300">
+                <a:latin typeface="Arial" panose="020B0604020202020204" pitchFamily="34" charset="0"/>
+              </a:rPr>
+              <a:t> </a:t>
+            </a:r>
+            <a:r>
+              <a:rPr kumimoji="0" lang="en-US" altLang="en-US" sz="1300" b="1" i="0" u="none" strike="noStrike" cap="none" normalizeH="0" baseline="0">
+                <a:ln>
+                  <a:noFill/>
+                </a:ln>
+                <a:solidFill>
+                  <a:schemeClr val="tx1"/>
+                </a:solidFill>
+                <a:effectLst/>
+                <a:latin typeface="Arial" panose="020B0604020202020204" pitchFamily="34" charset="0"/>
+              </a:rPr>
+              <a:t>$request</a:t>
+            </a:r>
+            <a:r>
+              <a:rPr kumimoji="0" lang="en-US" altLang="en-US" sz="1300" b="0" i="0" u="none" strike="noStrike" cap="none" normalizeH="0" baseline="0">
+                <a:ln>
+                  <a:noFill/>
+                </a:ln>
+                <a:solidFill>
+                  <a:schemeClr val="tx1"/>
+                </a:solidFill>
+                <a:effectLst/>
+                <a:latin typeface="Arial" panose="020B0604020202020204" pitchFamily="34" charset="0"/>
+              </a:rPr>
+              <a:t>, Laravel-in </a:t>
+            </a:r>
+            <a:r>
+              <a:rPr kumimoji="0" lang="en-US" altLang="en-US" sz="1300" b="1" i="0" u="none" strike="noStrike" cap="none" normalizeH="0" baseline="0">
+                <a:ln>
+                  <a:noFill/>
+                </a:ln>
+                <a:solidFill>
+                  <a:srgbClr val="FF0000"/>
+                </a:solidFill>
+                <a:effectLst/>
+                <a:latin typeface="Arial" panose="020B0604020202020204" pitchFamily="34" charset="0"/>
+              </a:rPr>
+              <a:t>Illuminate\Http\Request </a:t>
+            </a:r>
+            <a:r>
+              <a:rPr kumimoji="0" lang="en-US" altLang="en-US" sz="1300" b="0" i="0" u="none" strike="noStrike" cap="none" normalizeH="0" baseline="0">
+                <a:ln>
+                  <a:noFill/>
+                </a:ln>
+                <a:solidFill>
+                  <a:schemeClr val="tx1"/>
+                </a:solidFill>
+                <a:effectLst/>
+                <a:latin typeface="Arial" panose="020B0604020202020204" pitchFamily="34" charset="0"/>
+              </a:rPr>
+              <a:t>sinifindən gələn bir </a:t>
+            </a:r>
+            <a:r>
+              <a:rPr kumimoji="0" lang="en-US" altLang="en-US" sz="1300" b="1" i="0" u="none" strike="noStrike" cap="none" normalizeH="0" baseline="0">
+                <a:ln>
+                  <a:noFill/>
+                </a:ln>
+                <a:solidFill>
+                  <a:schemeClr val="tx1"/>
+                </a:solidFill>
+                <a:effectLst/>
+                <a:latin typeface="Arial" panose="020B0604020202020204" pitchFamily="34" charset="0"/>
+              </a:rPr>
+              <a:t>obyekt</a:t>
+            </a:r>
+            <a:r>
+              <a:rPr kumimoji="0" lang="en-US" altLang="en-US" sz="1300" b="0" i="0" u="none" strike="noStrike" cap="none" normalizeH="0" baseline="0">
+                <a:ln>
+                  <a:noFill/>
+                </a:ln>
+                <a:solidFill>
+                  <a:schemeClr val="tx1"/>
+                </a:solidFill>
+                <a:effectLst/>
+                <a:latin typeface="Arial" panose="020B0604020202020204" pitchFamily="34" charset="0"/>
+              </a:rPr>
+              <a:t> olub, istifadəçinin göndərdiyi məlumatları, faylları, header-ləri, method-u, URL-</a:t>
+            </a:r>
+            <a:r>
+              <a:rPr kumimoji="0" lang="az-Latn-AZ" altLang="en-US" sz="1300" b="0" i="0" u="none" strike="noStrike" cap="none" normalizeH="0" baseline="0">
+                <a:ln>
+                  <a:noFill/>
+                </a:ln>
+                <a:solidFill>
+                  <a:schemeClr val="tx1"/>
+                </a:solidFill>
+                <a:effectLst/>
+                <a:latin typeface="Arial" panose="020B0604020202020204" pitchFamily="34" charset="0"/>
+              </a:rPr>
+              <a:t>n</a:t>
+            </a:r>
+            <a:r>
+              <a:rPr kumimoji="0" lang="en-US" altLang="en-US" sz="1300" b="0" i="0" u="none" strike="noStrike" cap="none" normalizeH="0" baseline="0">
+                <a:ln>
+                  <a:noFill/>
+                </a:ln>
+                <a:solidFill>
+                  <a:schemeClr val="tx1"/>
+                </a:solidFill>
+                <a:effectLst/>
+                <a:latin typeface="Arial" panose="020B0604020202020204" pitchFamily="34" charset="0"/>
+              </a:rPr>
+              <a:t>i və s. </a:t>
+            </a:r>
+            <a:r>
+              <a:rPr kumimoji="0" lang="az-Latn-AZ" altLang="en-US" sz="1300" b="0" i="0" u="none" strike="noStrike" cap="none" normalizeH="0" baseline="0">
+                <a:ln>
+                  <a:noFill/>
+                </a:ln>
+                <a:solidFill>
+                  <a:schemeClr val="tx1"/>
+                </a:solidFill>
+                <a:effectLst/>
+                <a:latin typeface="Arial" panose="020B0604020202020204" pitchFamily="34" charset="0"/>
+              </a:rPr>
+              <a:t>özündə ehtiva edir</a:t>
+            </a:r>
+            <a:r>
+              <a:rPr kumimoji="0" lang="en-US" altLang="en-US" sz="1300" b="0" i="0" u="none" strike="noStrike" cap="none" normalizeH="0" baseline="0">
+                <a:ln>
+                  <a:noFill/>
+                </a:ln>
+                <a:solidFill>
+                  <a:schemeClr val="tx1"/>
+                </a:solidFill>
+                <a:effectLst/>
+                <a:latin typeface="Arial" panose="020B0604020202020204" pitchFamily="34" charset="0"/>
+              </a:rPr>
+              <a:t>.</a:t>
+            </a:r>
+            <a:endParaRPr kumimoji="0" lang="az-Latn-AZ" altLang="en-US" sz="1300" b="0" i="0" u="none" strike="noStrike" cap="none" normalizeH="0" baseline="0">
+              <a:ln>
+                <a:noFill/>
+              </a:ln>
+              <a:solidFill>
+                <a:schemeClr val="tx1"/>
+              </a:solidFill>
+              <a:effectLst/>
+              <a:latin typeface="Arial" panose="020B0604020202020204" pitchFamily="34" charset="0"/>
+            </a:endParaRPr>
+          </a:p>
+          <a:p>
+            <a:pPr>
+              <a:lnSpc>
+                <a:spcPct val="150000"/>
+              </a:lnSpc>
+            </a:pPr>
+            <a:endParaRPr kumimoji="0" lang="az-Latn-AZ" altLang="en-US" sz="1300" b="0" i="0" u="none" strike="noStrike" cap="none" normalizeH="0" baseline="0">
+              <a:ln>
+                <a:noFill/>
+              </a:ln>
+              <a:solidFill>
+                <a:schemeClr val="tx1"/>
+              </a:solidFill>
+              <a:effectLst/>
+              <a:latin typeface="Arial" panose="020B0604020202020204" pitchFamily="34" charset="0"/>
+            </a:endParaRPr>
+          </a:p>
+          <a:p>
+            <a:pPr>
+              <a:lnSpc>
+                <a:spcPct val="150000"/>
+              </a:lnSpc>
+            </a:pPr>
+            <a:r>
+              <a:rPr kumimoji="0" lang="en-US" altLang="en-US" sz="1300" b="1" i="0" u="none" strike="noStrike" cap="none" normalizeH="0" baseline="0">
+                <a:ln>
+                  <a:noFill/>
+                </a:ln>
+                <a:solidFill>
+                  <a:srgbClr val="00B050"/>
+                </a:solidFill>
+                <a:effectLst/>
+                <a:latin typeface="Arial" panose="020B0604020202020204" pitchFamily="34" charset="0"/>
+              </a:rPr>
+              <a:t>$request ilə işləyən əsas metodlar və fərqlilikləri</a:t>
+            </a:r>
+            <a:r>
+              <a:rPr kumimoji="0" lang="en-US" altLang="en-US" sz="1300" b="0" i="0" u="none" strike="noStrike" cap="none" normalizeH="0" baseline="0">
+                <a:ln>
+                  <a:noFill/>
+                </a:ln>
+                <a:solidFill>
+                  <a:schemeClr val="tx1"/>
+                </a:solidFill>
+                <a:effectLst/>
+                <a:latin typeface="Arial" panose="020B0604020202020204" pitchFamily="34" charset="0"/>
+              </a:rPr>
+              <a:t>:</a:t>
+            </a:r>
+            <a:endParaRPr kumimoji="0" lang="az-Latn-AZ" altLang="en-US" sz="1300" b="0" i="0" u="none" strike="noStrike" cap="none" normalizeH="0" baseline="0">
+              <a:ln>
+                <a:noFill/>
+              </a:ln>
+              <a:solidFill>
+                <a:schemeClr val="tx1"/>
+              </a:solidFill>
+              <a:effectLst/>
+              <a:latin typeface="Arial" panose="020B0604020202020204" pitchFamily="34" charset="0"/>
+            </a:endParaRPr>
+          </a:p>
+          <a:p>
+            <a:pPr>
+              <a:lnSpc>
+                <a:spcPct val="150000"/>
+              </a:lnSpc>
+            </a:pPr>
+            <a:endParaRPr kumimoji="0" lang="az-Latn-AZ" altLang="en-US" sz="1300" b="0" i="0" u="none" strike="noStrike" cap="none" normalizeH="0" baseline="0">
+              <a:ln>
+                <a:noFill/>
+              </a:ln>
+              <a:solidFill>
+                <a:schemeClr val="tx1"/>
+              </a:solidFill>
+              <a:effectLst/>
+              <a:latin typeface="Arial" panose="020B0604020202020204" pitchFamily="34" charset="0"/>
+            </a:endParaRPr>
+          </a:p>
+          <a:p>
+            <a:pPr>
+              <a:lnSpc>
+                <a:spcPct val="150000"/>
+              </a:lnSpc>
+            </a:pPr>
+            <a:r>
+              <a:rPr lang="az-Latn-AZ" altLang="en-US" sz="1300">
+                <a:latin typeface="Arial" panose="020B0604020202020204" pitchFamily="34" charset="0"/>
+              </a:rPr>
+              <a:t>1) </a:t>
+            </a:r>
+            <a:r>
+              <a:rPr lang="az-Latn-AZ" altLang="en-US" sz="1300" b="1">
+                <a:solidFill>
+                  <a:srgbClr val="00B0F0"/>
+                </a:solidFill>
+                <a:latin typeface="Arial" panose="020B0604020202020204" pitchFamily="34" charset="0"/>
+              </a:rPr>
+              <a:t>dd($request); </a:t>
+            </a:r>
+            <a:r>
+              <a:rPr lang="az-Latn-AZ" altLang="en-US" sz="1300">
+                <a:latin typeface="Arial" panose="020B0604020202020204" pitchFamily="34" charset="0"/>
+              </a:rPr>
+              <a:t>- bütün Request obyektini verir. Tam struktur, class, method-lar və s.</a:t>
+            </a:r>
+          </a:p>
+          <a:p>
+            <a:pPr marL="285750" indent="-285750">
+              <a:lnSpc>
+                <a:spcPct val="150000"/>
+              </a:lnSpc>
+              <a:buFont typeface="Arial" panose="020B0604020202020204" pitchFamily="34" charset="0"/>
+              <a:buChar char="•"/>
+            </a:pPr>
+            <a:r>
+              <a:rPr lang="az-Latn-AZ" altLang="en-US" sz="1300" b="1">
+                <a:latin typeface="Arial" panose="020B0604020202020204" pitchFamily="34" charset="0"/>
+              </a:rPr>
+              <a:t>İstifadə məqsədi</a:t>
+            </a:r>
+            <a:r>
+              <a:rPr lang="az-Latn-AZ" altLang="en-US" sz="1300">
+                <a:latin typeface="Arial" panose="020B0604020202020204" pitchFamily="34" charset="0"/>
+              </a:rPr>
+              <a:t>: Diqqətlə request obyektinin nə olduğunu öyrənmək. Bu Request, çox böyük və texniki ola bilər. </a:t>
+            </a:r>
+          </a:p>
+          <a:p>
+            <a:pPr marL="285750" indent="-285750">
+              <a:lnSpc>
+                <a:spcPct val="150000"/>
+              </a:lnSpc>
+              <a:buFont typeface="Arial" panose="020B0604020202020204" pitchFamily="34" charset="0"/>
+              <a:buChar char="•"/>
+            </a:pPr>
+            <a:endParaRPr lang="az-Latn-AZ" altLang="en-US" sz="1300">
+              <a:latin typeface="Arial" panose="020B0604020202020204" pitchFamily="34" charset="0"/>
+            </a:endParaRPr>
+          </a:p>
+          <a:p>
+            <a:pPr>
+              <a:lnSpc>
+                <a:spcPct val="150000"/>
+              </a:lnSpc>
+            </a:pPr>
+            <a:r>
+              <a:rPr lang="az-Latn-AZ" altLang="en-US" sz="1300">
+                <a:latin typeface="Arial" panose="020B0604020202020204" pitchFamily="34" charset="0"/>
+              </a:rPr>
+              <a:t>2) </a:t>
+            </a:r>
+            <a:r>
+              <a:rPr lang="az-Latn-AZ" altLang="en-US" sz="1300" b="1">
+                <a:solidFill>
+                  <a:srgbClr val="00B0F0"/>
+                </a:solidFill>
+                <a:latin typeface="Arial" panose="020B0604020202020204" pitchFamily="34" charset="0"/>
+              </a:rPr>
+              <a:t>dd($request-&gt;all());  </a:t>
+            </a:r>
+            <a:r>
+              <a:rPr lang="az-Latn-AZ" altLang="en-US" sz="1300">
+                <a:latin typeface="Arial" panose="020B0604020202020204" pitchFamily="34" charset="0"/>
+              </a:rPr>
+              <a:t>- sadəcə formdan (və ya URL query string-dən) gələn input məlumatlarını göstərir.</a:t>
+            </a:r>
+          </a:p>
+          <a:p>
+            <a:pPr marL="285750" indent="-285750">
+              <a:lnSpc>
+                <a:spcPct val="150000"/>
+              </a:lnSpc>
+              <a:buFont typeface="Arial" panose="020B0604020202020204" pitchFamily="34" charset="0"/>
+              <a:buChar char="•"/>
+            </a:pPr>
+            <a:r>
+              <a:rPr kumimoji="0" lang="az-Latn-AZ" altLang="en-US" sz="1300" b="0" i="0" u="none" strike="noStrike" cap="none" normalizeH="0" baseline="0">
+                <a:ln>
+                  <a:noFill/>
+                </a:ln>
+                <a:solidFill>
+                  <a:schemeClr val="tx1"/>
+                </a:solidFill>
+                <a:effectLst/>
+                <a:latin typeface="Arial" panose="020B0604020202020204" pitchFamily="34" charset="0"/>
+              </a:rPr>
+              <a:t>form sahələrindən (input, textarea, select və s.) gələn name atributlu məlumatları alır</a:t>
+            </a:r>
+          </a:p>
+          <a:p>
+            <a:pPr marL="285750" indent="-285750">
+              <a:lnSpc>
+                <a:spcPct val="150000"/>
+              </a:lnSpc>
+              <a:buFont typeface="Arial" panose="020B0604020202020204" pitchFamily="34" charset="0"/>
+              <a:buChar char="•"/>
+            </a:pPr>
+            <a:r>
+              <a:rPr kumimoji="0" lang="az-Latn-AZ" altLang="en-US" sz="1300" b="0" i="0" u="none" strike="noStrike" cap="none" normalizeH="0" baseline="0">
+                <a:ln>
+                  <a:noFill/>
+                </a:ln>
+                <a:solidFill>
+                  <a:schemeClr val="tx1"/>
+                </a:solidFill>
+                <a:effectLst/>
+                <a:latin typeface="Arial" panose="020B0604020202020204" pitchFamily="34" charset="0"/>
+              </a:rPr>
+              <a:t>həmçinin GET istəklərində URL-də gələn query-ləri də alır (məs: ?search=kitab)</a:t>
+            </a:r>
+          </a:p>
+          <a:p>
+            <a:pPr marL="285750" indent="-285750">
+              <a:lnSpc>
+                <a:spcPct val="150000"/>
+              </a:lnSpc>
+              <a:buFont typeface="Arial" panose="020B0604020202020204" pitchFamily="34" charset="0"/>
+              <a:buChar char="•"/>
+            </a:pPr>
+            <a:r>
+              <a:rPr kumimoji="0" lang="az-Latn-AZ" altLang="en-US" sz="1300" b="0" i="0" u="none" strike="noStrike" cap="none" normalizeH="0" baseline="0">
+                <a:ln>
+                  <a:noFill/>
+                </a:ln>
+                <a:solidFill>
+                  <a:schemeClr val="tx1"/>
+                </a:solidFill>
+                <a:effectLst/>
+                <a:latin typeface="Arial" panose="020B0604020202020204" pitchFamily="34" charset="0"/>
+              </a:rPr>
+              <a:t>Ancaq faylları (&lt;input type="file"&gt;) daxil etmir</a:t>
+            </a:r>
+          </a:p>
+          <a:p>
+            <a:pPr>
+              <a:lnSpc>
+                <a:spcPct val="150000"/>
+              </a:lnSpc>
+            </a:pPr>
+            <a:endParaRPr lang="az-Latn-AZ" altLang="en-US" sz="1300">
+              <a:latin typeface="Arial" panose="020B0604020202020204" pitchFamily="34" charset="0"/>
+            </a:endParaRPr>
+          </a:p>
+          <a:p>
+            <a:pPr>
+              <a:lnSpc>
+                <a:spcPct val="150000"/>
+              </a:lnSpc>
+            </a:pPr>
+            <a:endParaRPr kumimoji="0" lang="az-Latn-AZ" altLang="en-US" sz="1300" b="0" i="0" u="none" strike="noStrike" cap="none" normalizeH="0" baseline="0">
+              <a:ln>
+                <a:noFill/>
+              </a:ln>
+              <a:solidFill>
+                <a:schemeClr val="tx1"/>
+              </a:solidFill>
+              <a:effectLst/>
+              <a:latin typeface="Arial" panose="020B0604020202020204" pitchFamily="34" charset="0"/>
+            </a:endParaRPr>
+          </a:p>
+          <a:p>
+            <a:pPr>
+              <a:lnSpc>
+                <a:spcPct val="150000"/>
+              </a:lnSpc>
+            </a:pPr>
+            <a:r>
+              <a:rPr lang="az-Latn-AZ" altLang="en-US" sz="1300">
+                <a:latin typeface="Arial" panose="020B0604020202020204" pitchFamily="34" charset="0"/>
+              </a:rPr>
+              <a:t>Bu </a:t>
+            </a:r>
+            <a:r>
+              <a:rPr lang="az-Latn-AZ" altLang="en-US" sz="1300" b="1">
+                <a:latin typeface="Arial" panose="020B0604020202020204" pitchFamily="34" charset="0"/>
+              </a:rPr>
+              <a:t>all() </a:t>
+            </a:r>
+            <a:r>
+              <a:rPr lang="az-Latn-AZ" altLang="en-US" sz="1300">
+                <a:latin typeface="Arial" panose="020B0604020202020204" pitchFamily="34" charset="0"/>
+              </a:rPr>
+              <a:t>yaxud </a:t>
+            </a:r>
+            <a:r>
+              <a:rPr lang="az-Latn-AZ" altLang="en-US" sz="1300" b="1">
+                <a:latin typeface="Arial" panose="020B0604020202020204" pitchFamily="34" charset="0"/>
+              </a:rPr>
+              <a:t>file() </a:t>
+            </a:r>
+            <a:r>
+              <a:rPr lang="az-Latn-AZ" altLang="en-US" sz="1300">
+                <a:latin typeface="Arial" panose="020B0604020202020204" pitchFamily="34" charset="0"/>
+              </a:rPr>
+              <a:t>haqqında oxumaq üçün 19cu dərsə bax....</a:t>
+            </a:r>
+            <a:endParaRPr kumimoji="0" lang="az-Latn-AZ" altLang="en-US" sz="1300" b="0" i="0" u="none" strike="noStrike" cap="none" normalizeH="0" baseline="0">
+              <a:ln>
+                <a:noFill/>
+              </a:ln>
+              <a:solidFill>
+                <a:schemeClr val="tx1"/>
+              </a:solidFill>
+              <a:effectLst/>
+              <a:latin typeface="Arial" panose="020B0604020202020204" pitchFamily="34" charset="0"/>
+            </a:endParaRPr>
+          </a:p>
+          <a:p>
+            <a:pPr>
+              <a:lnSpc>
+                <a:spcPct val="150000"/>
+              </a:lnSpc>
+            </a:pPr>
+            <a:endParaRPr kumimoji="0" lang="en-US" altLang="en-US" sz="1300" b="0" i="0" u="none" strike="noStrike" cap="none" normalizeH="0" baseline="0">
+              <a:ln>
+                <a:noFill/>
+              </a:ln>
+              <a:solidFill>
+                <a:schemeClr val="tx1"/>
+              </a:solidFill>
+              <a:effectLst/>
+              <a:latin typeface="Arial" panose="020B0604020202020204" pitchFamily="34" charset="0"/>
+            </a:endParaRPr>
+          </a:p>
+        </p:txBody>
+      </p:sp>
+    </p:spTree>
+    <p:extLst>
+      <p:ext uri="{BB962C8B-B14F-4D97-AF65-F5344CB8AC3E}">
+        <p14:creationId xmlns:p14="http://schemas.microsoft.com/office/powerpoint/2010/main" val="68237415"/>
+      </p:ext>
+    </p:extLst>
+  </p:cSld>
+  <p:clrMapOvr>
+    <a:masterClrMapping/>
+  </p:clrMapOvr>
+</p:sld>
+</file>
+
+<file path=ppt/slides/slide8.xml><?xml version="1.0" encoding="utf-8"?>
+<p:sld xmlns:a="http://schemas.openxmlformats.org/drawingml/2006/main" xmlns:r="http://schemas.openxmlformats.org/officeDocument/2006/relationships" xmlns:p="http://schemas.openxmlformats.org/presentationml/2006/main">
+  <p:cSld>
+    <p:spTree>
+      <p:nvGrpSpPr>
+        <p:cNvPr id="1" name="">
+          <a:extLst>
+            <a:ext uri="{FF2B5EF4-FFF2-40B4-BE49-F238E27FC236}">
+              <a16:creationId xmlns:a16="http://schemas.microsoft.com/office/drawing/2014/main" id="{18056B24-BB47-B4A0-2F2E-39EFF0F27A40}"/>
+            </a:ext>
+          </a:extLst>
+        </p:cNvPr>
+        <p:cNvGrpSpPr/>
+        <p:nvPr/>
+      </p:nvGrpSpPr>
+      <p:grpSpPr>
+        <a:xfrm>
+          <a:off x="0" y="0"/>
+          <a:ext cx="0" cy="0"/>
+          <a:chOff x="0" y="0"/>
+          <a:chExt cx="0" cy="0"/>
+        </a:xfrm>
+      </p:grpSpPr>
+      <p:sp>
+        <p:nvSpPr>
+          <p:cNvPr id="3" name="TextBox 2">
+            <a:extLst>
+              <a:ext uri="{FF2B5EF4-FFF2-40B4-BE49-F238E27FC236}">
+                <a16:creationId xmlns:a16="http://schemas.microsoft.com/office/drawing/2014/main" id="{1A95811A-E62F-47C8-39D2-DC530ED3E4CC}"/>
+              </a:ext>
+            </a:extLst>
+          </p:cNvPr>
+          <p:cNvSpPr txBox="1"/>
+          <p:nvPr/>
+        </p:nvSpPr>
+        <p:spPr>
+          <a:xfrm>
+            <a:off x="217714" y="255046"/>
             <a:ext cx="11756571" cy="355354"/>
           </a:xfrm>
           <a:prstGeom prst="rect">
@@ -6317,7 +7160,93 @@
     </p:spTree>
     <p:extLst>
       <p:ext uri="{BB962C8B-B14F-4D97-AF65-F5344CB8AC3E}">
-        <p14:creationId xmlns:p14="http://schemas.microsoft.com/office/powerpoint/2010/main" val="68237415"/>
+        <p14:creationId xmlns:p14="http://schemas.microsoft.com/office/powerpoint/2010/main" val="2097893586"/>
+      </p:ext>
+    </p:extLst>
+  </p:cSld>
+  <p:clrMapOvr>
+    <a:masterClrMapping/>
+  </p:clrMapOvr>
+</p:sld>
+</file>
+
+<file path=ppt/slides/slide9.xml><?xml version="1.0" encoding="utf-8"?>
+<p:sld xmlns:a="http://schemas.openxmlformats.org/drawingml/2006/main" xmlns:r="http://schemas.openxmlformats.org/officeDocument/2006/relationships" xmlns:p="http://schemas.openxmlformats.org/presentationml/2006/main">
+  <p:cSld>
+    <p:spTree>
+      <p:nvGrpSpPr>
+        <p:cNvPr id="1" name="">
+          <a:extLst>
+            <a:ext uri="{FF2B5EF4-FFF2-40B4-BE49-F238E27FC236}">
+              <a16:creationId xmlns:a16="http://schemas.microsoft.com/office/drawing/2014/main" id="{FBFC1AEF-5503-FCDE-B9EE-762D1A8A5B72}"/>
+            </a:ext>
+          </a:extLst>
+        </p:cNvPr>
+        <p:cNvGrpSpPr/>
+        <p:nvPr/>
+      </p:nvGrpSpPr>
+      <p:grpSpPr>
+        <a:xfrm>
+          <a:off x="0" y="0"/>
+          <a:ext cx="0" cy="0"/>
+          <a:chOff x="0" y="0"/>
+          <a:chExt cx="0" cy="0"/>
+        </a:xfrm>
+      </p:grpSpPr>
+      <p:sp>
+        <p:nvSpPr>
+          <p:cNvPr id="3" name="TextBox 2">
+            <a:extLst>
+              <a:ext uri="{FF2B5EF4-FFF2-40B4-BE49-F238E27FC236}">
+                <a16:creationId xmlns:a16="http://schemas.microsoft.com/office/drawing/2014/main" id="{763F2FCE-15BF-6DFB-F903-5F79F87E0427}"/>
+              </a:ext>
+            </a:extLst>
+          </p:cNvPr>
+          <p:cNvSpPr txBox="1"/>
+          <p:nvPr/>
+        </p:nvSpPr>
+        <p:spPr>
+          <a:xfrm>
+            <a:off x="217714" y="255046"/>
+            <a:ext cx="11756571" cy="355354"/>
+          </a:xfrm>
+          <a:prstGeom prst="rect">
+            <a:avLst/>
+          </a:prstGeom>
+          <a:noFill/>
+        </p:spPr>
+        <p:txBody>
+          <a:bodyPr wrap="square">
+            <a:spAutoFit/>
+          </a:bodyPr>
+          <a:lstStyle/>
+          <a:p>
+            <a:pPr>
+              <a:lnSpc>
+                <a:spcPct val="150000"/>
+              </a:lnSpc>
+              <a:buNone/>
+            </a:pPr>
+            <a:r>
+              <a:rPr kumimoji="0" lang="en-US" altLang="en-US" sz="1300" b="0" i="0" u="none" strike="noStrike" cap="none" normalizeH="0" baseline="0">
+                <a:ln>
+                  <a:noFill/>
+                </a:ln>
+                <a:solidFill>
+                  <a:schemeClr val="tx1"/>
+                </a:solidFill>
+                <a:effectLst/>
+                <a:latin typeface="Arial" panose="020B0604020202020204" pitchFamily="34" charset="0"/>
+              </a:rPr>
+              <a:t>.</a:t>
+            </a:r>
+          </a:p>
+        </p:txBody>
+      </p:sp>
+    </p:spTree>
+    <p:extLst>
+      <p:ext uri="{BB962C8B-B14F-4D97-AF65-F5344CB8AC3E}">
+        <p14:creationId xmlns:p14="http://schemas.microsoft.com/office/powerpoint/2010/main" val="2201987938"/>
       </p:ext>
     </p:extLst>
   </p:cSld>
